--- a/apps/resources/bundled_files/2-klass-figuralar-oyun-1234.pptx
+++ b/apps/resources/bundled_files/2-klass-figuralar-oyun-1234.pptx
@@ -3781,7 +3781,7 @@
                 </a:solidFill>
                 <a:latin typeface="PT Sans"/>
               </a:rPr>
-              <a:t>2-класс ›</a:t>
+              <a:t/>
             </a:r>
           </a:p>
           <a:p>
@@ -4689,7 +4689,7 @@
                 </a:solidFill>
                 <a:latin typeface="PT Sans"/>
               </a:rPr>
-              <a:t>2-класс ›</a:t>
+              <a:t/>
             </a:r>
           </a:p>
           <a:p>
@@ -5902,7 +5902,7 @@
                 </a:solidFill>
                 <a:latin typeface="PT Sans"/>
               </a:rPr>
-              <a:t>2-класс ›</a:t>
+              <a:t/>
             </a:r>
           </a:p>
           <a:p>
@@ -7343,7 +7343,7 @@
                 </a:solidFill>
                 <a:latin typeface="PT Sans"/>
               </a:rPr>
-              <a:t>2-класс ›</a:t>
+              <a:t/>
             </a:r>
           </a:p>
           <a:p>
@@ -8568,7 +8568,7 @@
                 </a:solidFill>
                 <a:latin typeface="PT Sans"/>
               </a:rPr>
-              <a:t>2-класс ›</a:t>
+              <a:t/>
             </a:r>
           </a:p>
           <a:p>
@@ -10021,7 +10021,7 @@
                 </a:solidFill>
                 <a:latin typeface="PT Sans"/>
               </a:rPr>
-              <a:t>2-класс ›</a:t>
+              <a:t/>
             </a:r>
           </a:p>
           <a:p>
@@ -12832,7 +12832,7 @@
                 </a:solidFill>
                 <a:latin typeface="PT Sans"/>
               </a:rPr>
-              <a:t>2-класс ›</a:t>
+              <a:t/>
             </a:r>
           </a:p>
           <a:p>
@@ -15871,7 +15871,7 @@
                 </a:solidFill>
                 <a:latin typeface="PT Sans"/>
               </a:rPr>
-              <a:t>2-класс ›</a:t>
+              <a:t/>
             </a:r>
           </a:p>
           <a:p>
@@ -18472,7 +18472,7 @@
                 </a:solidFill>
                 <a:latin typeface="PT Sans"/>
               </a:rPr>
-              <a:t>2-класс ›</a:t>
+              <a:t/>
             </a:r>
           </a:p>
           <a:p>
